--- a/Old Rugged Cross_CH.pptx
+++ b/Old Rugged Cross_CH.pptx
@@ -113,6 +113,11 @@
       </a:defRPr>
     </a:lvl9pPr>
   </p:defaultTextStyle>
+  <p:extLst>
+    <p:ext uri="{EFAFB233-063F-42B5-8137-9DF3F51BA10A}">
+      <p15:sldGuideLst xmlns:p15="http://schemas.microsoft.com/office/powerpoint/2012/main"/>
+    </p:ext>
+  </p:extLst>
 </p:presentation>
 </file>
 
@@ -263,7 +268,7 @@
           <a:p>
             <a:fld id="{101D37A0-9713-0D4B-8BFD-0D4CAF2F28EF}" type="datetimeFigureOut">
               <a:rPr lang="en-US" smtClean="0"/>
-              <a:t>5/31/26</a:t>
+              <a:t>6/13/26</a:t>
             </a:fld>
             <a:endParaRPr lang="en-US"/>
           </a:p>
@@ -461,7 +466,7 @@
           <a:p>
             <a:fld id="{101D37A0-9713-0D4B-8BFD-0D4CAF2F28EF}" type="datetimeFigureOut">
               <a:rPr lang="en-US" smtClean="0"/>
-              <a:t>5/31/26</a:t>
+              <a:t>6/13/26</a:t>
             </a:fld>
             <a:endParaRPr lang="en-US"/>
           </a:p>
@@ -669,7 +674,7 @@
           <a:p>
             <a:fld id="{101D37A0-9713-0D4B-8BFD-0D4CAF2F28EF}" type="datetimeFigureOut">
               <a:rPr lang="en-US" smtClean="0"/>
-              <a:t>5/31/26</a:t>
+              <a:t>6/13/26</a:t>
             </a:fld>
             <a:endParaRPr lang="en-US"/>
           </a:p>
@@ -867,7 +872,7 @@
           <a:p>
             <a:fld id="{101D37A0-9713-0D4B-8BFD-0D4CAF2F28EF}" type="datetimeFigureOut">
               <a:rPr lang="en-US" smtClean="0"/>
-              <a:t>5/31/26</a:t>
+              <a:t>6/13/26</a:t>
             </a:fld>
             <a:endParaRPr lang="en-US"/>
           </a:p>
@@ -1142,7 +1147,7 @@
           <a:p>
             <a:fld id="{101D37A0-9713-0D4B-8BFD-0D4CAF2F28EF}" type="datetimeFigureOut">
               <a:rPr lang="en-US" smtClean="0"/>
-              <a:t>5/31/26</a:t>
+              <a:t>6/13/26</a:t>
             </a:fld>
             <a:endParaRPr lang="en-US"/>
           </a:p>
@@ -1407,7 +1412,7 @@
           <a:p>
             <a:fld id="{101D37A0-9713-0D4B-8BFD-0D4CAF2F28EF}" type="datetimeFigureOut">
               <a:rPr lang="en-US" smtClean="0"/>
-              <a:t>5/31/26</a:t>
+              <a:t>6/13/26</a:t>
             </a:fld>
             <a:endParaRPr lang="en-US"/>
           </a:p>
@@ -1819,7 +1824,7 @@
           <a:p>
             <a:fld id="{101D37A0-9713-0D4B-8BFD-0D4CAF2F28EF}" type="datetimeFigureOut">
               <a:rPr lang="en-US" smtClean="0"/>
-              <a:t>5/31/26</a:t>
+              <a:t>6/13/26</a:t>
             </a:fld>
             <a:endParaRPr lang="en-US"/>
           </a:p>
@@ -1960,7 +1965,7 @@
           <a:p>
             <a:fld id="{101D37A0-9713-0D4B-8BFD-0D4CAF2F28EF}" type="datetimeFigureOut">
               <a:rPr lang="en-US" smtClean="0"/>
-              <a:t>5/31/26</a:t>
+              <a:t>6/13/26</a:t>
             </a:fld>
             <a:endParaRPr lang="en-US"/>
           </a:p>
@@ -2073,7 +2078,7 @@
           <a:p>
             <a:fld id="{101D37A0-9713-0D4B-8BFD-0D4CAF2F28EF}" type="datetimeFigureOut">
               <a:rPr lang="en-US" smtClean="0"/>
-              <a:t>5/31/26</a:t>
+              <a:t>6/13/26</a:t>
             </a:fld>
             <a:endParaRPr lang="en-US"/>
           </a:p>
@@ -2384,7 +2389,7 @@
           <a:p>
             <a:fld id="{101D37A0-9713-0D4B-8BFD-0D4CAF2F28EF}" type="datetimeFigureOut">
               <a:rPr lang="en-US" smtClean="0"/>
-              <a:t>5/31/26</a:t>
+              <a:t>6/13/26</a:t>
             </a:fld>
             <a:endParaRPr lang="en-US"/>
           </a:p>
@@ -2672,7 +2677,7 @@
           <a:p>
             <a:fld id="{101D37A0-9713-0D4B-8BFD-0D4CAF2F28EF}" type="datetimeFigureOut">
               <a:rPr lang="en-US" smtClean="0"/>
-              <a:t>5/31/26</a:t>
+              <a:t>6/13/26</a:t>
             </a:fld>
             <a:endParaRPr lang="en-US"/>
           </a:p>
@@ -2913,7 +2918,7 @@
           <a:p>
             <a:fld id="{101D37A0-9713-0D4B-8BFD-0D4CAF2F28EF}" type="datetimeFigureOut">
               <a:rPr lang="en-US" smtClean="0"/>
-              <a:t>5/31/26</a:t>
+              <a:t>6/13/26</a:t>
             </a:fld>
             <a:endParaRPr lang="en-US"/>
           </a:p>
@@ -3617,8 +3622,8 @@
         </p:nvSpPr>
         <p:spPr>
           <a:xfrm>
-            <a:off x="11277600" y="6378411"/>
-            <a:ext cx="703385" cy="369332"/>
+            <a:off x="10565027" y="6273225"/>
+            <a:ext cx="1428315" cy="584775"/>
           </a:xfrm>
           <a:prstGeom prst="rect">
             <a:avLst/>
@@ -3649,7 +3654,7 @@
               <a:defRPr/>
             </a:pPr>
             <a:r>
-              <a:rPr kumimoji="0" lang="en-US" sz="1800" b="1" i="0" u="none" strike="noStrike" kern="1200" cap="none" spc="0" normalizeH="0" baseline="0" noProof="0" dirty="0">
+              <a:rPr kumimoji="0" lang="en-US" sz="3200" b="1" i="0" u="none" strike="noStrike" kern="1200" cap="none" spc="0" normalizeH="0" baseline="0" noProof="0" dirty="0">
                 <a:ln>
                   <a:noFill/>
                 </a:ln>
